--- a/FINALDOCS/POSTER/VARIANT_A/M_RAG_A1_FINAL_EDITABLE.pptx
+++ b/FINALDOCS/POSTER/VARIANT_A/M_RAG_A1_FINAL_EDITABLE.pptx
@@ -11310,7 +11310,7 @@
                 <a:latin typeface="Malgun Gothic"/>
                 <a:ea typeface="Malgun Gothic"/>
               </a:rPr>
-              <a:t>- 한 지표가 중요하면 기법 하나(관련성, 개념과 결과 질문은 HyDE)</a:t>
+              <a:t>- 관련성과 응답 시간이 중요하면 HyDE 하나(개념과 결과 질문 포함)</a:t>
             </a:r>
           </a:p>
         </p:txBody>

--- a/FINALDOCS/POSTER/VARIANT_A/M_RAG_A1_FINAL_EDITABLE.pptx
+++ b/FINALDOCS/POSTER/VARIANT_A/M_RAG_A1_FINAL_EDITABLE.pptx
@@ -3833,7 +3833,7 @@
         </p:nvSpPr>
         <p:spPr>
           <a:xfrm>
-            <a:off x="792000" y="15125425"/>
+            <a:off x="792000" y="15107425"/>
             <a:ext cx="9612000" cy="335301"/>
           </a:xfrm>
           <a:prstGeom prst="rect">
@@ -3873,7 +3873,7 @@
         </p:nvSpPr>
         <p:spPr>
           <a:xfrm>
-            <a:off x="792000" y="15550726"/>
+            <a:off x="792000" y="15514726"/>
             <a:ext cx="9612000" cy="335301"/>
           </a:xfrm>
           <a:prstGeom prst="rect">
@@ -3913,8 +3913,8 @@
         </p:nvSpPr>
         <p:spPr>
           <a:xfrm>
-            <a:off x="10980000" y="14700124"/>
-            <a:ext cx="9612000" cy="670602"/>
+            <a:off x="792000" y="15922027"/>
+            <a:ext cx="9612000" cy="335301"/>
           </a:xfrm>
           <a:prstGeom prst="rect">
             <a:avLst/>
@@ -3940,8 +3940,7 @@
                 <a:latin typeface="Malgun Gothic"/>
                 <a:ea typeface="Malgun Gothic"/>
               </a:rPr>
-              <a:t>- 답변 품질은 RAGAS의 근거 충실도, 답변 관련성,
-  문맥 정밀도, 문맥 재현율(0에서 1)</a:t>
+              <a:t>- 관측값은 모두 0에서 1, 앞의 네 지표는 RAGAS로 계산</a:t>
             </a:r>
           </a:p>
         </p:txBody>
@@ -3954,47 +3953,7 @@
         </p:nvSpPr>
         <p:spPr>
           <a:xfrm>
-            <a:off x="10980000" y="15460726"/>
-            <a:ext cx="9612000" cy="335301"/>
-          </a:xfrm>
-          <a:prstGeom prst="rect">
-            <a:avLst/>
-          </a:prstGeom>
-          <a:noFill/>
-        </p:spPr>
-        <p:txBody>
-          <a:bodyPr wrap="square" lIns="0" rIns="0" tIns="0" bIns="0">
-            <a:spAutoFit/>
-          </a:bodyPr>
-          <a:lstStyle/>
-          <a:p>
-            <a:pPr algn="l">
-              <a:lnSpc>
-                <a:spcPct val="115000"/>
-              </a:lnSpc>
-            </a:pPr>
-            <a:r>
-              <a:rPr sz="2000" b="0">
-                <a:solidFill>
-                  <a:srgbClr val="263044"/>
-                </a:solidFill>
-                <a:latin typeface="Malgun Gothic"/>
-                <a:ea typeface="Malgun Gothic"/>
-              </a:rPr>
-              <a:t>- 출력 언어는 한국어 문자 비율</a:t>
-            </a:r>
-          </a:p>
-        </p:txBody>
-      </p:sp>
-      <p:sp>
-        <p:nvSpPr>
-          <p:cNvPr id="24" name="TextBox 23"/>
-          <p:cNvSpPr txBox="1"/>
-          <p:nvPr/>
-        </p:nvSpPr>
-        <p:spPr>
-          <a:xfrm>
-            <a:off x="10980000" y="15886027"/>
+            <a:off x="792000" y="16329329"/>
             <a:ext cx="9612000" cy="670602"/>
           </a:xfrm>
           <a:prstGeom prst="rect">
@@ -4027,6 +3986,831 @@
           </a:p>
         </p:txBody>
       </p:sp>
+      <p:graphicFrame>
+        <p:nvGraphicFramePr>
+          <p:cNvPr id="24" name="Table 23"/>
+          <p:cNvGraphicFramePr>
+            <a:graphicFrameLocks noGrp="1"/>
+          </p:cNvGraphicFramePr>
+          <p:nvPr/>
+        </p:nvGraphicFramePr>
+        <p:xfrm>
+          <a:off x="10980000" y="14700124"/>
+          <a:ext cx="9611999" cy="2362299"/>
+        </p:xfrm>
+        <a:graphic>
+          <a:graphicData uri="http://schemas.openxmlformats.org/drawingml/2006/table">
+            <a:tbl>
+              <a:tblPr firstRow="0" bandRow="0">
+                <a:tableStyleId>{5940675A-B579-460E-94D1-54222C63F5DA}</a:tableStyleId>
+              </a:tblPr>
+              <a:tblGrid>
+                <a:gridCol w="1848461"/>
+                <a:gridCol w="5083269"/>
+                <a:gridCol w="2680269"/>
+              </a:tblGrid>
+              <a:tr h="349814">
+                <a:tc>
+                  <a:txBody>
+                    <a:bodyPr wrap="square"/>
+                    <a:lstStyle/>
+                    <a:p>
+                      <a:pPr algn="ctr"/>
+                      <a:r>
+                        <a:rPr sz="1700" b="1">
+                          <a:solidFill>
+                            <a:srgbClr val="263044"/>
+                          </a:solidFill>
+                          <a:latin typeface="Malgun Gothic"/>
+                        </a:rPr>
+                        <a:t>지표</a:t>
+                      </a:r>
+                    </a:p>
+                  </a:txBody>
+                  <a:tcPr marL="57600" marR="57600" marT="21600" marB="21600" anchor="ctr">
+                    <a:solidFill>
+                      <a:srgbClr val="FFFFFF"/>
+                    </a:solidFill>
+                    <a:lnL w="9525">
+                      <a:solidFill>
+                        <a:srgbClr val="777777"/>
+                      </a:solidFill>
+                    </a:lnL>
+                    <a:lnR w="9525">
+                      <a:solidFill>
+                        <a:srgbClr val="777777"/>
+                      </a:solidFill>
+                    </a:lnR>
+                    <a:lnT w="9525">
+                      <a:solidFill>
+                        <a:srgbClr val="777777"/>
+                      </a:solidFill>
+                    </a:lnT>
+                    <a:lnB w="9525">
+                      <a:solidFill>
+                        <a:srgbClr val="777777"/>
+                      </a:solidFill>
+                    </a:lnB>
+                  </a:tcPr>
+                </a:tc>
+                <a:tc>
+                  <a:txBody>
+                    <a:bodyPr wrap="square"/>
+                    <a:lstStyle/>
+                    <a:p>
+                      <a:pPr algn="ctr"/>
+                      <a:r>
+                        <a:rPr sz="1700" b="1">
+                          <a:solidFill>
+                            <a:srgbClr val="263044"/>
+                          </a:solidFill>
+                          <a:latin typeface="Malgun Gothic"/>
+                        </a:rPr>
+                        <a:t>측정 내용</a:t>
+                      </a:r>
+                    </a:p>
+                  </a:txBody>
+                  <a:tcPr marL="57600" marR="57600" marT="21600" marB="21600" anchor="ctr">
+                    <a:solidFill>
+                      <a:srgbClr val="FFFFFF"/>
+                    </a:solidFill>
+                    <a:lnL w="9525">
+                      <a:solidFill>
+                        <a:srgbClr val="777777"/>
+                      </a:solidFill>
+                    </a:lnL>
+                    <a:lnR w="9525">
+                      <a:solidFill>
+                        <a:srgbClr val="777777"/>
+                      </a:solidFill>
+                    </a:lnR>
+                    <a:lnT w="9525">
+                      <a:solidFill>
+                        <a:srgbClr val="777777"/>
+                      </a:solidFill>
+                    </a:lnT>
+                    <a:lnB w="9525">
+                      <a:solidFill>
+                        <a:srgbClr val="777777"/>
+                      </a:solidFill>
+                    </a:lnB>
+                  </a:tcPr>
+                </a:tc>
+                <a:tc>
+                  <a:txBody>
+                    <a:bodyPr wrap="square"/>
+                    <a:lstStyle/>
+                    <a:p>
+                      <a:pPr algn="ctr"/>
+                      <a:r>
+                        <a:rPr sz="1700" b="1">
+                          <a:solidFill>
+                            <a:srgbClr val="263044"/>
+                          </a:solidFill>
+                          <a:latin typeface="Malgun Gothic"/>
+                        </a:rPr>
+                        <a:t>값의 방향</a:t>
+                      </a:r>
+                    </a:p>
+                  </a:txBody>
+                  <a:tcPr marL="57600" marR="57600" marT="21600" marB="21600" anchor="ctr">
+                    <a:solidFill>
+                      <a:srgbClr val="FFFFFF"/>
+                    </a:solidFill>
+                    <a:lnL w="9525">
+                      <a:solidFill>
+                        <a:srgbClr val="777777"/>
+                      </a:solidFill>
+                    </a:lnL>
+                    <a:lnR w="9525">
+                      <a:solidFill>
+                        <a:srgbClr val="777777"/>
+                      </a:solidFill>
+                    </a:lnR>
+                    <a:lnT w="9525">
+                      <a:solidFill>
+                        <a:srgbClr val="777777"/>
+                      </a:solidFill>
+                    </a:lnT>
+                    <a:lnB w="9525">
+                      <a:solidFill>
+                        <a:srgbClr val="777777"/>
+                      </a:solidFill>
+                    </a:lnB>
+                  </a:tcPr>
+                </a:tc>
+              </a:tr>
+              <a:tr h="349814">
+                <a:tc>
+                  <a:txBody>
+                    <a:bodyPr wrap="square"/>
+                    <a:lstStyle/>
+                    <a:p>
+                      <a:pPr algn="l"/>
+                      <a:r>
+                        <a:rPr sz="1700" b="0">
+                          <a:solidFill>
+                            <a:srgbClr val="263044"/>
+                          </a:solidFill>
+                          <a:latin typeface="Malgun Gothic"/>
+                        </a:rPr>
+                        <a:t>근거 충실도</a:t>
+                      </a:r>
+                    </a:p>
+                  </a:txBody>
+                  <a:tcPr marL="57600" marR="57600" marT="21600" marB="21600" anchor="ctr">
+                    <a:solidFill>
+                      <a:srgbClr val="FFFFFF"/>
+                    </a:solidFill>
+                    <a:lnL w="9525">
+                      <a:solidFill>
+                        <a:srgbClr val="777777"/>
+                      </a:solidFill>
+                    </a:lnL>
+                    <a:lnR w="9525">
+                      <a:solidFill>
+                        <a:srgbClr val="777777"/>
+                      </a:solidFill>
+                    </a:lnR>
+                    <a:lnT w="9525">
+                      <a:solidFill>
+                        <a:srgbClr val="777777"/>
+                      </a:solidFill>
+                    </a:lnT>
+                    <a:lnB w="9525">
+                      <a:solidFill>
+                        <a:srgbClr val="777777"/>
+                      </a:solidFill>
+                    </a:lnB>
+                  </a:tcPr>
+                </a:tc>
+                <a:tc>
+                  <a:txBody>
+                    <a:bodyPr wrap="square"/>
+                    <a:lstStyle/>
+                    <a:p>
+                      <a:pPr algn="l"/>
+                      <a:r>
+                        <a:rPr sz="1700" b="0">
+                          <a:solidFill>
+                            <a:srgbClr val="263044"/>
+                          </a:solidFill>
+                          <a:latin typeface="Malgun Gothic"/>
+                        </a:rPr>
+                        <a:t>답변의 주장 중 검색 구간이 뒷받침하는 비율</a:t>
+                      </a:r>
+                    </a:p>
+                  </a:txBody>
+                  <a:tcPr marL="57600" marR="57600" marT="21600" marB="21600" anchor="ctr">
+                    <a:solidFill>
+                      <a:srgbClr val="FFFFFF"/>
+                    </a:solidFill>
+                    <a:lnL w="9525">
+                      <a:solidFill>
+                        <a:srgbClr val="777777"/>
+                      </a:solidFill>
+                    </a:lnL>
+                    <a:lnR w="9525">
+                      <a:solidFill>
+                        <a:srgbClr val="777777"/>
+                      </a:solidFill>
+                    </a:lnR>
+                    <a:lnT w="9525">
+                      <a:solidFill>
+                        <a:srgbClr val="777777"/>
+                      </a:solidFill>
+                    </a:lnT>
+                    <a:lnB w="9525">
+                      <a:solidFill>
+                        <a:srgbClr val="777777"/>
+                      </a:solidFill>
+                    </a:lnB>
+                  </a:tcPr>
+                </a:tc>
+                <a:tc>
+                  <a:txBody>
+                    <a:bodyPr wrap="square"/>
+                    <a:lstStyle/>
+                    <a:p>
+                      <a:pPr algn="l"/>
+                      <a:r>
+                        <a:rPr sz="1700" b="0">
+                          <a:solidFill>
+                            <a:srgbClr val="263044"/>
+                          </a:solidFill>
+                          <a:latin typeface="Malgun Gothic"/>
+                        </a:rPr>
+                        <a:t>높을수록 근거에 충실</a:t>
+                      </a:r>
+                    </a:p>
+                  </a:txBody>
+                  <a:tcPr marL="57600" marR="57600" marT="21600" marB="21600" anchor="ctr">
+                    <a:solidFill>
+                      <a:srgbClr val="FFFFFF"/>
+                    </a:solidFill>
+                    <a:lnL w="9525">
+                      <a:solidFill>
+                        <a:srgbClr val="777777"/>
+                      </a:solidFill>
+                    </a:lnL>
+                    <a:lnR w="9525">
+                      <a:solidFill>
+                        <a:srgbClr val="777777"/>
+                      </a:solidFill>
+                    </a:lnR>
+                    <a:lnT w="9525">
+                      <a:solidFill>
+                        <a:srgbClr val="777777"/>
+                      </a:solidFill>
+                    </a:lnT>
+                    <a:lnB w="9525">
+                      <a:solidFill>
+                        <a:srgbClr val="777777"/>
+                      </a:solidFill>
+                    </a:lnB>
+                  </a:tcPr>
+                </a:tc>
+              </a:tr>
+              <a:tr h="613229">
+                <a:tc>
+                  <a:txBody>
+                    <a:bodyPr wrap="square"/>
+                    <a:lstStyle/>
+                    <a:p>
+                      <a:pPr algn="l"/>
+                      <a:r>
+                        <a:rPr sz="1700" b="0">
+                          <a:solidFill>
+                            <a:srgbClr val="263044"/>
+                          </a:solidFill>
+                          <a:latin typeface="Malgun Gothic"/>
+                        </a:rPr>
+                        <a:t>답변 관련성</a:t>
+                      </a:r>
+                    </a:p>
+                  </a:txBody>
+                  <a:tcPr marL="57600" marR="57600" marT="21600" marB="21600" anchor="ctr">
+                    <a:solidFill>
+                      <a:srgbClr val="FFFFFF"/>
+                    </a:solidFill>
+                    <a:lnL w="9525">
+                      <a:solidFill>
+                        <a:srgbClr val="777777"/>
+                      </a:solidFill>
+                    </a:lnL>
+                    <a:lnR w="9525">
+                      <a:solidFill>
+                        <a:srgbClr val="777777"/>
+                      </a:solidFill>
+                    </a:lnR>
+                    <a:lnT w="9525">
+                      <a:solidFill>
+                        <a:srgbClr val="777777"/>
+                      </a:solidFill>
+                    </a:lnT>
+                    <a:lnB w="9525">
+                      <a:solidFill>
+                        <a:srgbClr val="777777"/>
+                      </a:solidFill>
+                    </a:lnB>
+                  </a:tcPr>
+                </a:tc>
+                <a:tc>
+                  <a:txBody>
+                    <a:bodyPr wrap="square"/>
+                    <a:lstStyle/>
+                    <a:p>
+                      <a:pPr algn="l"/>
+                      <a:r>
+                        <a:rPr sz="1700" b="0">
+                          <a:solidFill>
+                            <a:srgbClr val="263044"/>
+                          </a:solidFill>
+                          <a:latin typeface="Malgun Gothic"/>
+                        </a:rPr>
+                        <a:t>답변에서 역으로 만든 질문과 원래 질문의 유사도</a:t>
+                      </a:r>
+                    </a:p>
+                    <a:p>
+                      <a:pPr algn="l"/>
+                      <a:r>
+                        <a:rPr sz="1700" b="0">
+                          <a:solidFill>
+                            <a:srgbClr val="263044"/>
+                          </a:solidFill>
+                          <a:latin typeface="Malgun Gothic"/>
+                        </a:rPr>
+                        <a:t>모호하거나 회피하는 답변은 0</a:t>
+                      </a:r>
+                    </a:p>
+                  </a:txBody>
+                  <a:tcPr marL="57600" marR="57600" marT="21600" marB="21600" anchor="ctr">
+                    <a:solidFill>
+                      <a:srgbClr val="FFFFFF"/>
+                    </a:solidFill>
+                    <a:lnL w="9525">
+                      <a:solidFill>
+                        <a:srgbClr val="777777"/>
+                      </a:solidFill>
+                    </a:lnL>
+                    <a:lnR w="9525">
+                      <a:solidFill>
+                        <a:srgbClr val="777777"/>
+                      </a:solidFill>
+                    </a:lnR>
+                    <a:lnT w="9525">
+                      <a:solidFill>
+                        <a:srgbClr val="777777"/>
+                      </a:solidFill>
+                    </a:lnT>
+                    <a:lnB w="9525">
+                      <a:solidFill>
+                        <a:srgbClr val="777777"/>
+                      </a:solidFill>
+                    </a:lnB>
+                  </a:tcPr>
+                </a:tc>
+                <a:tc>
+                  <a:txBody>
+                    <a:bodyPr wrap="square"/>
+                    <a:lstStyle/>
+                    <a:p>
+                      <a:pPr algn="l"/>
+                      <a:r>
+                        <a:rPr sz="1700" b="0">
+                          <a:solidFill>
+                            <a:srgbClr val="263044"/>
+                          </a:solidFill>
+                          <a:latin typeface="Malgun Gothic"/>
+                        </a:rPr>
+                        <a:t>높을수록 질문에 부합</a:t>
+                      </a:r>
+                    </a:p>
+                  </a:txBody>
+                  <a:tcPr marL="57600" marR="57600" marT="21600" marB="21600" anchor="ctr">
+                    <a:solidFill>
+                      <a:srgbClr val="FFFFFF"/>
+                    </a:solidFill>
+                    <a:lnL w="9525">
+                      <a:solidFill>
+                        <a:srgbClr val="777777"/>
+                      </a:solidFill>
+                    </a:lnL>
+                    <a:lnR w="9525">
+                      <a:solidFill>
+                        <a:srgbClr val="777777"/>
+                      </a:solidFill>
+                    </a:lnR>
+                    <a:lnT w="9525">
+                      <a:solidFill>
+                        <a:srgbClr val="777777"/>
+                      </a:solidFill>
+                    </a:lnT>
+                    <a:lnB w="9525">
+                      <a:solidFill>
+                        <a:srgbClr val="777777"/>
+                      </a:solidFill>
+                    </a:lnB>
+                  </a:tcPr>
+                </a:tc>
+              </a:tr>
+              <a:tr h="349814">
+                <a:tc>
+                  <a:txBody>
+                    <a:bodyPr wrap="square"/>
+                    <a:lstStyle/>
+                    <a:p>
+                      <a:pPr algn="l"/>
+                      <a:r>
+                        <a:rPr sz="1700" b="0">
+                          <a:solidFill>
+                            <a:srgbClr val="263044"/>
+                          </a:solidFill>
+                          <a:latin typeface="Malgun Gothic"/>
+                        </a:rPr>
+                        <a:t>문맥 정밀도</a:t>
+                      </a:r>
+                    </a:p>
+                  </a:txBody>
+                  <a:tcPr marL="57600" marR="57600" marT="21600" marB="21600" anchor="ctr">
+                    <a:solidFill>
+                      <a:srgbClr val="FFFFFF"/>
+                    </a:solidFill>
+                    <a:lnL w="9525">
+                      <a:solidFill>
+                        <a:srgbClr val="777777"/>
+                      </a:solidFill>
+                    </a:lnL>
+                    <a:lnR w="9525">
+                      <a:solidFill>
+                        <a:srgbClr val="777777"/>
+                      </a:solidFill>
+                    </a:lnR>
+                    <a:lnT w="9525">
+                      <a:solidFill>
+                        <a:srgbClr val="777777"/>
+                      </a:solidFill>
+                    </a:lnT>
+                    <a:lnB w="9525">
+                      <a:solidFill>
+                        <a:srgbClr val="777777"/>
+                      </a:solidFill>
+                    </a:lnB>
+                  </a:tcPr>
+                </a:tc>
+                <a:tc>
+                  <a:txBody>
+                    <a:bodyPr wrap="square"/>
+                    <a:lstStyle/>
+                    <a:p>
+                      <a:pPr algn="l"/>
+                      <a:r>
+                        <a:rPr sz="1700" b="0">
+                          <a:solidFill>
+                            <a:srgbClr val="263044"/>
+                          </a:solidFill>
+                          <a:latin typeface="Malgun Gothic"/>
+                        </a:rPr>
+                        <a:t>참조 답변에 유용한 구간의 순위가 높은 정도</a:t>
+                      </a:r>
+                    </a:p>
+                  </a:txBody>
+                  <a:tcPr marL="57600" marR="57600" marT="21600" marB="21600" anchor="ctr">
+                    <a:solidFill>
+                      <a:srgbClr val="FFFFFF"/>
+                    </a:solidFill>
+                    <a:lnL w="9525">
+                      <a:solidFill>
+                        <a:srgbClr val="777777"/>
+                      </a:solidFill>
+                    </a:lnL>
+                    <a:lnR w="9525">
+                      <a:solidFill>
+                        <a:srgbClr val="777777"/>
+                      </a:solidFill>
+                    </a:lnR>
+                    <a:lnT w="9525">
+                      <a:solidFill>
+                        <a:srgbClr val="777777"/>
+                      </a:solidFill>
+                    </a:lnT>
+                    <a:lnB w="9525">
+                      <a:solidFill>
+                        <a:srgbClr val="777777"/>
+                      </a:solidFill>
+                    </a:lnB>
+                  </a:tcPr>
+                </a:tc>
+                <a:tc>
+                  <a:txBody>
+                    <a:bodyPr wrap="square"/>
+                    <a:lstStyle/>
+                    <a:p>
+                      <a:pPr algn="l"/>
+                      <a:r>
+                        <a:rPr sz="1700" b="0">
+                          <a:solidFill>
+                            <a:srgbClr val="263044"/>
+                          </a:solidFill>
+                          <a:latin typeface="Malgun Gothic"/>
+                        </a:rPr>
+                        <a:t>높을수록 순위가 적절</a:t>
+                      </a:r>
+                    </a:p>
+                  </a:txBody>
+                  <a:tcPr marL="57600" marR="57600" marT="21600" marB="21600" anchor="ctr">
+                    <a:solidFill>
+                      <a:srgbClr val="FFFFFF"/>
+                    </a:solidFill>
+                    <a:lnL w="9525">
+                      <a:solidFill>
+                        <a:srgbClr val="777777"/>
+                      </a:solidFill>
+                    </a:lnL>
+                    <a:lnR w="9525">
+                      <a:solidFill>
+                        <a:srgbClr val="777777"/>
+                      </a:solidFill>
+                    </a:lnR>
+                    <a:lnT w="9525">
+                      <a:solidFill>
+                        <a:srgbClr val="777777"/>
+                      </a:solidFill>
+                    </a:lnT>
+                    <a:lnB w="9525">
+                      <a:solidFill>
+                        <a:srgbClr val="777777"/>
+                      </a:solidFill>
+                    </a:lnB>
+                  </a:tcPr>
+                </a:tc>
+              </a:tr>
+              <a:tr h="349814">
+                <a:tc>
+                  <a:txBody>
+                    <a:bodyPr wrap="square"/>
+                    <a:lstStyle/>
+                    <a:p>
+                      <a:pPr algn="l"/>
+                      <a:r>
+                        <a:rPr sz="1700" b="0">
+                          <a:solidFill>
+                            <a:srgbClr val="263044"/>
+                          </a:solidFill>
+                          <a:latin typeface="Malgun Gothic"/>
+                        </a:rPr>
+                        <a:t>문맥 재현율</a:t>
+                      </a:r>
+                    </a:p>
+                  </a:txBody>
+                  <a:tcPr marL="57600" marR="57600" marT="21600" marB="21600" anchor="ctr">
+                    <a:solidFill>
+                      <a:srgbClr val="FFFFFF"/>
+                    </a:solidFill>
+                    <a:lnL w="9525">
+                      <a:solidFill>
+                        <a:srgbClr val="777777"/>
+                      </a:solidFill>
+                    </a:lnL>
+                    <a:lnR w="9525">
+                      <a:solidFill>
+                        <a:srgbClr val="777777"/>
+                      </a:solidFill>
+                    </a:lnR>
+                    <a:lnT w="9525">
+                      <a:solidFill>
+                        <a:srgbClr val="777777"/>
+                      </a:solidFill>
+                    </a:lnT>
+                    <a:lnB w="9525">
+                      <a:solidFill>
+                        <a:srgbClr val="777777"/>
+                      </a:solidFill>
+                    </a:lnB>
+                  </a:tcPr>
+                </a:tc>
+                <a:tc>
+                  <a:txBody>
+                    <a:bodyPr wrap="square"/>
+                    <a:lstStyle/>
+                    <a:p>
+                      <a:pPr algn="l"/>
+                      <a:r>
+                        <a:rPr sz="1700" b="0">
+                          <a:solidFill>
+                            <a:srgbClr val="263044"/>
+                          </a:solidFill>
+                          <a:latin typeface="Malgun Gothic"/>
+                        </a:rPr>
+                        <a:t>참조 답변의 주장을 검색 구간이 뒷받침하는 비율</a:t>
+                      </a:r>
+                    </a:p>
+                  </a:txBody>
+                  <a:tcPr marL="57600" marR="57600" marT="21600" marB="21600" anchor="ctr">
+                    <a:solidFill>
+                      <a:srgbClr val="FFFFFF"/>
+                    </a:solidFill>
+                    <a:lnL w="9525">
+                      <a:solidFill>
+                        <a:srgbClr val="777777"/>
+                      </a:solidFill>
+                    </a:lnL>
+                    <a:lnR w="9525">
+                      <a:solidFill>
+                        <a:srgbClr val="777777"/>
+                      </a:solidFill>
+                    </a:lnR>
+                    <a:lnT w="9525">
+                      <a:solidFill>
+                        <a:srgbClr val="777777"/>
+                      </a:solidFill>
+                    </a:lnT>
+                    <a:lnB w="9525">
+                      <a:solidFill>
+                        <a:srgbClr val="777777"/>
+                      </a:solidFill>
+                    </a:lnB>
+                  </a:tcPr>
+                </a:tc>
+                <a:tc>
+                  <a:txBody>
+                    <a:bodyPr wrap="square"/>
+                    <a:lstStyle/>
+                    <a:p>
+                      <a:pPr algn="l"/>
+                      <a:r>
+                        <a:rPr sz="1700" b="0">
+                          <a:solidFill>
+                            <a:srgbClr val="263044"/>
+                          </a:solidFill>
+                          <a:latin typeface="Malgun Gothic"/>
+                        </a:rPr>
+                        <a:t>높을수록 정답 근거 확보</a:t>
+                      </a:r>
+                    </a:p>
+                  </a:txBody>
+                  <a:tcPr marL="57600" marR="57600" marT="21600" marB="21600" anchor="ctr">
+                    <a:solidFill>
+                      <a:srgbClr val="FFFFFF"/>
+                    </a:solidFill>
+                    <a:lnL w="9525">
+                      <a:solidFill>
+                        <a:srgbClr val="777777"/>
+                      </a:solidFill>
+                    </a:lnL>
+                    <a:lnR w="9525">
+                      <a:solidFill>
+                        <a:srgbClr val="777777"/>
+                      </a:solidFill>
+                    </a:lnR>
+                    <a:lnT w="9525">
+                      <a:solidFill>
+                        <a:srgbClr val="777777"/>
+                      </a:solidFill>
+                    </a:lnT>
+                    <a:lnB w="9525">
+                      <a:solidFill>
+                        <a:srgbClr val="777777"/>
+                      </a:solidFill>
+                    </a:lnB>
+                  </a:tcPr>
+                </a:tc>
+              </a:tr>
+              <a:tr h="349814">
+                <a:tc>
+                  <a:txBody>
+                    <a:bodyPr wrap="square"/>
+                    <a:lstStyle/>
+                    <a:p>
+                      <a:pPr algn="l"/>
+                      <a:r>
+                        <a:rPr sz="1700" b="0">
+                          <a:solidFill>
+                            <a:srgbClr val="263044"/>
+                          </a:solidFill>
+                          <a:latin typeface="Malgun Gothic"/>
+                        </a:rPr>
+                        <a:t>한국어 문자 비율</a:t>
+                      </a:r>
+                    </a:p>
+                  </a:txBody>
+                  <a:tcPr marL="57600" marR="57600" marT="21600" marB="21600" anchor="ctr">
+                    <a:solidFill>
+                      <a:srgbClr val="FFFFFF"/>
+                    </a:solidFill>
+                    <a:lnL w="9525">
+                      <a:solidFill>
+                        <a:srgbClr val="777777"/>
+                      </a:solidFill>
+                    </a:lnL>
+                    <a:lnR w="9525">
+                      <a:solidFill>
+                        <a:srgbClr val="777777"/>
+                      </a:solidFill>
+                    </a:lnR>
+                    <a:lnT w="9525">
+                      <a:solidFill>
+                        <a:srgbClr val="777777"/>
+                      </a:solidFill>
+                    </a:lnT>
+                    <a:lnB w="9525">
+                      <a:solidFill>
+                        <a:srgbClr val="777777"/>
+                      </a:solidFill>
+                    </a:lnB>
+                  </a:tcPr>
+                </a:tc>
+                <a:tc>
+                  <a:txBody>
+                    <a:bodyPr wrap="square"/>
+                    <a:lstStyle/>
+                    <a:p>
+                      <a:pPr algn="l"/>
+                      <a:r>
+                        <a:rPr sz="1700" b="0">
+                          <a:solidFill>
+                            <a:srgbClr val="263044"/>
+                          </a:solidFill>
+                          <a:latin typeface="Malgun Gothic"/>
+                        </a:rPr>
+                        <a:t>출력 언어, 한글 ÷ (한글 + ASCII 영문자)</a:t>
+                      </a:r>
+                    </a:p>
+                  </a:txBody>
+                  <a:tcPr marL="57600" marR="57600" marT="21600" marB="21600" anchor="ctr">
+                    <a:solidFill>
+                      <a:srgbClr val="FFFFFF"/>
+                    </a:solidFill>
+                    <a:lnL w="9525">
+                      <a:solidFill>
+                        <a:srgbClr val="777777"/>
+                      </a:solidFill>
+                    </a:lnL>
+                    <a:lnR w="9525">
+                      <a:solidFill>
+                        <a:srgbClr val="777777"/>
+                      </a:solidFill>
+                    </a:lnR>
+                    <a:lnT w="9525">
+                      <a:solidFill>
+                        <a:srgbClr val="777777"/>
+                      </a:solidFill>
+                    </a:lnT>
+                    <a:lnB w="9525">
+                      <a:solidFill>
+                        <a:srgbClr val="777777"/>
+                      </a:solidFill>
+                    </a:lnB>
+                  </a:tcPr>
+                </a:tc>
+                <a:tc>
+                  <a:txBody>
+                    <a:bodyPr wrap="square"/>
+                    <a:lstStyle/>
+                    <a:p>
+                      <a:pPr algn="l"/>
+                      <a:r>
+                        <a:rPr sz="1700" b="0">
+                          <a:solidFill>
+                            <a:srgbClr val="263044"/>
+                          </a:solidFill>
+                          <a:latin typeface="Malgun Gothic"/>
+                        </a:rPr>
+                        <a:t>높을수록 한국어 출력</a:t>
+                      </a:r>
+                    </a:p>
+                  </a:txBody>
+                  <a:tcPr marL="57600" marR="57600" marT="21600" marB="21600" anchor="ctr">
+                    <a:solidFill>
+                      <a:srgbClr val="FFFFFF"/>
+                    </a:solidFill>
+                    <a:lnL w="9525">
+                      <a:solidFill>
+                        <a:srgbClr val="777777"/>
+                      </a:solidFill>
+                    </a:lnL>
+                    <a:lnR w="9525">
+                      <a:solidFill>
+                        <a:srgbClr val="777777"/>
+                      </a:solidFill>
+                    </a:lnR>
+                    <a:lnT w="9525">
+                      <a:solidFill>
+                        <a:srgbClr val="777777"/>
+                      </a:solidFill>
+                    </a:lnT>
+                    <a:lnB w="9525">
+                      <a:solidFill>
+                        <a:srgbClr val="777777"/>
+                      </a:solidFill>
+                    </a:lnB>
+                  </a:tcPr>
+                </a:tc>
+              </a:tr>
+            </a:tbl>
+          </a:graphicData>
+        </a:graphic>
+      </p:graphicFrame>
       <p:sp>
         <p:nvSpPr>
           <p:cNvPr id="25" name="Rectangle 24"/>
@@ -4035,7 +4819,7 @@
         </p:nvSpPr>
         <p:spPr>
           <a:xfrm>
-            <a:off x="792000" y="16790630"/>
+            <a:off x="792000" y="17215931"/>
             <a:ext cx="19800000" cy="468000"/>
           </a:xfrm>
           <a:prstGeom prst="rect">
@@ -4079,7 +4863,7 @@
         </p:nvSpPr>
         <p:spPr>
           <a:xfrm>
-            <a:off x="936000" y="16815830"/>
+            <a:off x="936000" y="17241131"/>
             <a:ext cx="19512000" cy="360000"/>
           </a:xfrm>
           <a:prstGeom prst="rect">
@@ -4120,7 +4904,7 @@
           <p:nvPr/>
         </p:nvGraphicFramePr>
         <p:xfrm>
-          <a:off x="792000" y="17402630"/>
+          <a:off x="792000" y="17827931"/>
           <a:ext cx="19799991" cy="3761555"/>
         </p:xfrm>
         <a:graphic>
@@ -11119,7 +11903,7 @@
         </p:nvSpPr>
         <p:spPr>
           <a:xfrm>
-            <a:off x="792000" y="21272190"/>
+            <a:off x="792000" y="21697491"/>
             <a:ext cx="19800000" cy="318536"/>
           </a:xfrm>
           <a:prstGeom prst="rect">
@@ -11159,7 +11943,7 @@
         </p:nvSpPr>
         <p:spPr>
           <a:xfrm>
-            <a:off x="792000" y="21680726"/>
+            <a:off x="792000" y="22106027"/>
             <a:ext cx="19800000" cy="318536"/>
           </a:xfrm>
           <a:prstGeom prst="rect">
@@ -11199,7 +11983,7 @@
         </p:nvSpPr>
         <p:spPr>
           <a:xfrm>
-            <a:off x="10980000" y="22233262"/>
+            <a:off x="10980000" y="22658563"/>
             <a:ext cx="9612000" cy="468000"/>
           </a:xfrm>
           <a:prstGeom prst="rect">
@@ -11243,7 +12027,7 @@
         </p:nvSpPr>
         <p:spPr>
           <a:xfrm>
-            <a:off x="11124000" y="22258462"/>
+            <a:off x="11124000" y="22683763"/>
             <a:ext cx="9324000" cy="360000"/>
           </a:xfrm>
           <a:prstGeom prst="rect">
@@ -11283,8 +12067,8 @@
         </p:nvSpPr>
         <p:spPr>
           <a:xfrm>
-            <a:off x="10980000" y="22845262"/>
-            <a:ext cx="9612000" cy="352066"/>
+            <a:off x="10980000" y="23342563"/>
+            <a:ext cx="9612000" cy="804722"/>
           </a:xfrm>
           <a:prstGeom prst="rect">
             <a:avLst/>
@@ -11303,14 +12087,15 @@
               </a:lnSpc>
             </a:pPr>
             <a:r>
-              <a:rPr sz="2100" b="0">
+              <a:rPr sz="2400" b="0">
                 <a:solidFill>
                   <a:srgbClr val="263044"/>
                 </a:solidFill>
                 <a:latin typeface="Malgun Gothic"/>
                 <a:ea typeface="Malgun Gothic"/>
               </a:rPr>
-              <a:t>- 관련성과 응답 시간이 중요하면 HyDE 하나(개념과 결과 질문 포함)</a:t>
+              <a:t>- 관련성과 응답 시간이 중요하면 HyDE 하나
+  (개념과 결과 질문 포함)</a:t>
             </a:r>
           </a:p>
         </p:txBody>
@@ -11323,8 +12108,8 @@
         </p:nvSpPr>
         <p:spPr>
           <a:xfrm>
-            <a:off x="10980000" y="23566018"/>
-            <a:ext cx="9612000" cy="352066"/>
+            <a:off x="10980000" y="24651286"/>
+            <a:ext cx="9612000" cy="402361"/>
           </a:xfrm>
           <a:prstGeom prst="rect">
             <a:avLst/>
@@ -11343,7 +12128,7 @@
               </a:lnSpc>
             </a:pPr>
             <a:r>
-              <a:rPr sz="2100" b="0">
+              <a:rPr sz="2400" b="0">
                 <a:solidFill>
                   <a:srgbClr val="263044"/>
                 </a:solidFill>
@@ -11363,8 +12148,8 @@
         </p:nvSpPr>
         <p:spPr>
           <a:xfrm>
-            <a:off x="10980000" y="24286774"/>
-            <a:ext cx="9612000" cy="352066"/>
+            <a:off x="10980000" y="25557647"/>
+            <a:ext cx="9612000" cy="402361"/>
           </a:xfrm>
           <a:prstGeom prst="rect">
             <a:avLst/>
@@ -11383,7 +12168,7 @@
               </a:lnSpc>
             </a:pPr>
             <a:r>
-              <a:rPr sz="2100" b="0">
+              <a:rPr sz="2400" b="0">
                 <a:solidFill>
                   <a:srgbClr val="263044"/>
                 </a:solidFill>
@@ -11403,8 +12188,8 @@
         </p:nvSpPr>
         <p:spPr>
           <a:xfrm>
-            <a:off x="10980000" y="25007530"/>
-            <a:ext cx="9612000" cy="352066"/>
+            <a:off x="10980000" y="26464009"/>
+            <a:ext cx="9612000" cy="804722"/>
           </a:xfrm>
           <a:prstGeom prst="rect">
             <a:avLst/>
@@ -11423,14 +12208,15 @@
               </a:lnSpc>
             </a:pPr>
             <a:r>
-              <a:rPr sz="2100" b="0">
+              <a:rPr sz="2400" b="0">
                 <a:solidFill>
                   <a:srgbClr val="263044"/>
                 </a:solidFill>
                 <a:latin typeface="Malgun Gothic"/>
                 <a:ea typeface="Malgun Gothic"/>
               </a:rPr>
-              <a:t>- 조합은 HyDE 단독보다 관련성이 낮고 일관된 이득은 SCD의 한국어 비율</a:t>
+              <a:t>- 조합은 HyDE 단독보다 관련성이 낮고
+  일관된 이득은 SCD의 한국어 비율</a:t>
             </a:r>
           </a:p>
         </p:txBody>
@@ -11443,7 +12229,7 @@
         </p:nvSpPr>
         <p:spPr>
           <a:xfrm>
-            <a:off x="10980000" y="26096976"/>
+            <a:off x="792000" y="22658563"/>
             <a:ext cx="9612000" cy="468000"/>
           </a:xfrm>
           <a:prstGeom prst="rect">
@@ -11487,251 +12273,7 @@
         </p:nvSpPr>
         <p:spPr>
           <a:xfrm>
-            <a:off x="11124000" y="26122176"/>
-            <a:ext cx="9324000" cy="360000"/>
-          </a:xfrm>
-          <a:prstGeom prst="rect">
-            <a:avLst/>
-          </a:prstGeom>
-          <a:noFill/>
-        </p:spPr>
-        <p:txBody>
-          <a:bodyPr wrap="square" lIns="0" rIns="0" tIns="0" bIns="0">
-            <a:spAutoFit/>
-          </a:bodyPr>
-          <a:lstStyle/>
-          <a:p>
-            <a:pPr algn="l">
-              <a:lnSpc>
-                <a:spcPct val="115000"/>
-              </a:lnSpc>
-            </a:pPr>
-            <a:r>
-              <a:rPr sz="2700" b="1">
-                <a:solidFill>
-                  <a:srgbClr val="FFFFFF"/>
-                </a:solidFill>
-                <a:latin typeface="Malgun Gothic"/>
-                <a:ea typeface="Malgun Gothic"/>
-              </a:rPr>
-              <a:t>07 실제 답변에서 확인한 점</a:t>
-            </a:r>
-          </a:p>
-        </p:txBody>
-      </p:sp>
-      <p:sp>
-        <p:nvSpPr>
-          <p:cNvPr id="38" name="TextBox 37"/>
-          <p:cNvSpPr txBox="1"/>
-          <p:nvPr/>
-        </p:nvSpPr>
-        <p:spPr>
-          <a:xfrm>
-            <a:off x="10980000" y="26708976"/>
-            <a:ext cx="9612000" cy="352066"/>
-          </a:xfrm>
-          <a:prstGeom prst="rect">
-            <a:avLst/>
-          </a:prstGeom>
-          <a:noFill/>
-        </p:spPr>
-        <p:txBody>
-          <a:bodyPr wrap="square" lIns="0" rIns="0" tIns="0" bIns="0">
-            <a:spAutoFit/>
-          </a:bodyPr>
-          <a:lstStyle/>
-          <a:p>
-            <a:pPr algn="l">
-              <a:lnSpc>
-                <a:spcPct val="115000"/>
-              </a:lnSpc>
-            </a:pPr>
-            <a:r>
-              <a:rPr sz="2100" b="0">
-                <a:solidFill>
-                  <a:srgbClr val="263044"/>
-                </a:solidFill>
-                <a:latin typeface="Malgun Gothic"/>
-                <a:ea typeface="Malgun Gothic"/>
-              </a:rPr>
-              <a:t>- BIC 질문은 HyDE가 근거 구간을 찾아 관련성이 0.00에서 0.89로 오름</a:t>
-            </a:r>
-          </a:p>
-        </p:txBody>
-      </p:sp>
-      <p:sp>
-        <p:nvSpPr>
-          <p:cNvPr id="39" name="TextBox 38"/>
-          <p:cNvSpPr txBox="1"/>
-          <p:nvPr/>
-        </p:nvSpPr>
-        <p:spPr>
-          <a:xfrm>
-            <a:off x="10980000" y="27429732"/>
-            <a:ext cx="9612000" cy="352066"/>
-          </a:xfrm>
-          <a:prstGeom prst="rect">
-            <a:avLst/>
-          </a:prstGeom>
-          <a:noFill/>
-        </p:spPr>
-        <p:txBody>
-          <a:bodyPr wrap="square" lIns="0" rIns="0" tIns="0" bIns="0">
-            <a:spAutoFit/>
-          </a:bodyPr>
-          <a:lstStyle/>
-          <a:p>
-            <a:pPr algn="l">
-              <a:lnSpc>
-                <a:spcPct val="115000"/>
-              </a:lnSpc>
-            </a:pPr>
-            <a:r>
-              <a:rPr sz="2100" b="0">
-                <a:solidFill>
-                  <a:srgbClr val="263044"/>
-                </a:solidFill>
-                <a:latin typeface="Malgun Gothic"/>
-                <a:ea typeface="Malgun Gothic"/>
-              </a:rPr>
-              <a:t>- QuALITY 질문은 HyDE 후 73.68이 빠져 관련성이 0.87에서 0.00으로 내림</a:t>
-            </a:r>
-          </a:p>
-        </p:txBody>
-      </p:sp>
-      <p:sp>
-        <p:nvSpPr>
-          <p:cNvPr id="40" name="TextBox 39"/>
-          <p:cNvSpPr txBox="1"/>
-          <p:nvPr/>
-        </p:nvSpPr>
-        <p:spPr>
-          <a:xfrm>
-            <a:off x="10980000" y="28150488"/>
-            <a:ext cx="9612000" cy="352066"/>
-          </a:xfrm>
-          <a:prstGeom prst="rect">
-            <a:avLst/>
-          </a:prstGeom>
-          <a:noFill/>
-        </p:spPr>
-        <p:txBody>
-          <a:bodyPr wrap="square" lIns="0" rIns="0" tIns="0" bIns="0">
-            <a:spAutoFit/>
-          </a:bodyPr>
-          <a:lstStyle/>
-          <a:p>
-            <a:pPr algn="l">
-              <a:lnSpc>
-                <a:spcPct val="115000"/>
-              </a:lnSpc>
-            </a:pPr>
-            <a:r>
-              <a:rPr sz="2100" b="0">
-                <a:solidFill>
-                  <a:srgbClr val="263044"/>
-                </a:solidFill>
-                <a:latin typeface="Malgun Gothic"/>
-                <a:ea typeface="Malgun Gothic"/>
-              </a:rPr>
-              <a:t>- XSUM 질문은 CAD가 다른 행 수치를 옮겼는데 충실도가 0.53에서 0.87로 오름</a:t>
-            </a:r>
-          </a:p>
-        </p:txBody>
-      </p:sp>
-      <p:sp>
-        <p:nvSpPr>
-          <p:cNvPr id="41" name="TextBox 40"/>
-          <p:cNvSpPr txBox="1"/>
-          <p:nvPr/>
-        </p:nvSpPr>
-        <p:spPr>
-          <a:xfrm>
-            <a:off x="10980000" y="28871244"/>
-            <a:ext cx="9612000" cy="352066"/>
-          </a:xfrm>
-          <a:prstGeom prst="rect">
-            <a:avLst/>
-          </a:prstGeom>
-          <a:noFill/>
-        </p:spPr>
-        <p:txBody>
-          <a:bodyPr wrap="square" lIns="0" rIns="0" tIns="0" bIns="0">
-            <a:spAutoFit/>
-          </a:bodyPr>
-          <a:lstStyle/>
-          <a:p>
-            <a:pPr algn="l">
-              <a:lnSpc>
-                <a:spcPct val="115000"/>
-              </a:lnSpc>
-            </a:pPr>
-            <a:r>
-              <a:rPr sz="2100" b="0">
-                <a:solidFill>
-                  <a:srgbClr val="263044"/>
-                </a:solidFill>
-                <a:latin typeface="Malgun Gothic"/>
-                <a:ea typeface="Malgun Gothic"/>
-              </a:rPr>
-              <a:t>- RAG 이점 질문은 CAD 후 지시문만 남아 관련성이 0.90에서 0.00으로 내림</a:t>
-            </a:r>
-          </a:p>
-        </p:txBody>
-      </p:sp>
-      <p:sp>
-        <p:nvSpPr>
-          <p:cNvPr id="42" name="Rectangle 41"/>
-          <p:cNvSpPr/>
-          <p:nvPr/>
-        </p:nvSpPr>
-        <p:spPr>
-          <a:xfrm>
-            <a:off x="792000" y="22233262"/>
-            <a:ext cx="9612000" cy="468000"/>
-          </a:xfrm>
-          <a:prstGeom prst="rect">
-            <a:avLst/>
-          </a:prstGeom>
-          <a:solidFill>
-            <a:srgbClr val="695184"/>
-          </a:solidFill>
-          <a:ln>
-            <a:noFill/>
-          </a:ln>
-          <a:effectLst/>
-        </p:spPr>
-        <p:style>
-          <a:lnRef idx="1">
-            <a:schemeClr val="accent1"/>
-          </a:lnRef>
-          <a:fillRef idx="3">
-            <a:schemeClr val="accent1"/>
-          </a:fillRef>
-          <a:effectRef idx="2">
-            <a:schemeClr val="accent1"/>
-          </a:effectRef>
-          <a:fontRef idx="minor">
-            <a:schemeClr val="lt1"/>
-          </a:fontRef>
-        </p:style>
-        <p:txBody>
-          <a:bodyPr rtlCol="0" anchor="ctr"/>
-          <a:lstStyle/>
-          <a:p>
-            <a:pPr algn="ctr"/>
-          </a:p>
-        </p:txBody>
-      </p:sp>
-      <p:sp>
-        <p:nvSpPr>
-          <p:cNvPr id="43" name="TextBox 42"/>
-          <p:cNvSpPr txBox="1"/>
-          <p:nvPr/>
-        </p:nvSpPr>
-        <p:spPr>
-          <a:xfrm>
-            <a:off x="936000" y="22258462"/>
+            <a:off x="936000" y="22683763"/>
             <a:ext cx="9324000" cy="360000"/>
           </a:xfrm>
           <a:prstGeom prst="rect">
@@ -11765,7 +12307,7 @@
       </p:sp>
       <p:pic>
         <p:nvPicPr>
-          <p:cNvPr id="44" name="Picture 43" descr="poster_parallel.png"/>
+          <p:cNvPr id="38" name="Picture 37" descr="poster_parallel.png"/>
           <p:cNvPicPr>
             <a:picLocks noChangeAspect="1"/>
           </p:cNvPicPr>
@@ -11779,8 +12321,8 @@
         </p:blipFill>
         <p:spPr>
           <a:xfrm>
-            <a:off x="792000" y="22845262"/>
-            <a:ext cx="9612000" cy="5990352"/>
+            <a:off x="792000" y="23270563"/>
+            <a:ext cx="9612000" cy="5565083"/>
           </a:xfrm>
           <a:prstGeom prst="rect">
             <a:avLst/>
@@ -11789,13 +12331,13 @@
       </p:pic>
       <p:sp>
         <p:nvSpPr>
-          <p:cNvPr id="45" name="TextBox 44"/>
+          <p:cNvPr id="39" name="TextBox 38"/>
           <p:cNvSpPr txBox="1"/>
           <p:nvPr/>
         </p:nvSpPr>
         <p:spPr>
           <a:xfrm>
-            <a:off x="792000" y="28871614"/>
+            <a:off x="792000" y="28871646"/>
             <a:ext cx="9612000" cy="637072"/>
           </a:xfrm>
           <a:prstGeom prst="rect">
@@ -11830,13 +12372,13 @@
       </p:sp>
       <p:sp>
         <p:nvSpPr>
-          <p:cNvPr id="46" name="TextBox 45"/>
+          <p:cNvPr id="40" name="TextBox 39"/>
           <p:cNvSpPr txBox="1"/>
           <p:nvPr/>
         </p:nvSpPr>
         <p:spPr>
           <a:xfrm>
-            <a:off x="792000" y="29706686"/>
+            <a:off x="792000" y="29706719"/>
             <a:ext cx="19800000" cy="324000"/>
           </a:xfrm>
           <a:prstGeom prst="rect">

--- a/FINALDOCS/POSTER/VARIANT_A/M_RAG_A1_FINAL_EDITABLE.pptx
+++ b/FINALDOCS/POSTER/VARIANT_A/M_RAG_A1_FINAL_EDITABLE.pptx
@@ -11983,8 +11983,8 @@
         </p:nvSpPr>
         <p:spPr>
           <a:xfrm>
-            <a:off x="10980000" y="22658563"/>
-            <a:ext cx="9612000" cy="468000"/>
+            <a:off x="792000" y="22658563"/>
+            <a:ext cx="19800000" cy="468000"/>
           </a:xfrm>
           <a:prstGeom prst="rect">
             <a:avLst/>
@@ -12027,8 +12027,8 @@
         </p:nvSpPr>
         <p:spPr>
           <a:xfrm>
-            <a:off x="11124000" y="22683763"/>
-            <a:ext cx="9324000" cy="360000"/>
+            <a:off x="936000" y="22683763"/>
+            <a:ext cx="19512000" cy="360000"/>
           </a:xfrm>
           <a:prstGeom prst="rect">
             <a:avLst/>
@@ -12054,21 +12054,45 @@
                 <a:latin typeface="Malgun Gothic"/>
                 <a:ea typeface="Malgun Gothic"/>
               </a:rPr>
-              <a:t>06 결론</a:t>
+              <a:t>05 방법 질문 25개의 원점수 평행좌표</a:t>
             </a:r>
           </a:p>
         </p:txBody>
       </p:sp>
+      <p:pic>
+        <p:nvPicPr>
+          <p:cNvPr id="32" name="Picture 31" descr="poster_parallel.png"/>
+          <p:cNvPicPr>
+            <a:picLocks noChangeAspect="1"/>
+          </p:cNvPicPr>
+          <p:nvPr/>
+        </p:nvPicPr>
+        <p:blipFill>
+          <a:blip r:embed="rId3"/>
+          <a:stretch>
+            <a:fillRect/>
+          </a:stretch>
+        </p:blipFill>
+        <p:spPr>
+          <a:xfrm>
+            <a:off x="792000" y="23270563"/>
+            <a:ext cx="19800000" cy="4238938"/>
+          </a:xfrm>
+          <a:prstGeom prst="rect">
+            <a:avLst/>
+          </a:prstGeom>
+        </p:spPr>
+      </p:pic>
       <p:sp>
         <p:nvSpPr>
-          <p:cNvPr id="32" name="TextBox 31"/>
+          <p:cNvPr id="33" name="TextBox 32"/>
           <p:cNvSpPr txBox="1"/>
           <p:nvPr/>
         </p:nvSpPr>
         <p:spPr>
           <a:xfrm>
-            <a:off x="10980000" y="23342563"/>
-            <a:ext cx="9612000" cy="804722"/>
+            <a:off x="792000" y="27545501"/>
+            <a:ext cx="19800000" cy="318536"/>
           </a:xfrm>
           <a:prstGeom prst="rect">
             <a:avLst/>
@@ -12087,150 +12111,28 @@
               </a:lnSpc>
             </a:pPr>
             <a:r>
-              <a:rPr sz="2400" b="0">
+              <a:rPr sz="1900" b="0">
                 <a:solidFill>
                   <a:srgbClr val="263044"/>
                 </a:solidFill>
                 <a:latin typeface="Malgun Gothic"/>
                 <a:ea typeface="Malgun Gothic"/>
               </a:rPr>
-              <a:t>- 관련성과 응답 시간이 중요하면 HyDE 하나
-  (개념과 결과 질문 포함)</a:t>
+              <a:t>- HyDE 적용 후 관련성 축의 선이 위로 모이고 관련성 0점 답변이 5개에서 1개로 줄어듦</a:t>
             </a:r>
           </a:p>
         </p:txBody>
       </p:sp>
       <p:sp>
         <p:nvSpPr>
-          <p:cNvPr id="33" name="TextBox 32"/>
-          <p:cNvSpPr txBox="1"/>
-          <p:nvPr/>
-        </p:nvSpPr>
-        <p:spPr>
-          <a:xfrm>
-            <a:off x="10980000" y="24651286"/>
-            <a:ext cx="9612000" cy="402361"/>
-          </a:xfrm>
-          <a:prstGeom prst="rect">
-            <a:avLst/>
-          </a:prstGeom>
-          <a:noFill/>
-        </p:spPr>
-        <p:txBody>
-          <a:bodyPr wrap="square" lIns="0" rIns="0" tIns="0" bIns="0">
-            <a:spAutoFit/>
-          </a:bodyPr>
-          <a:lstStyle/>
-          <a:p>
-            <a:pPr algn="l">
-              <a:lnSpc>
-                <a:spcPct val="115000"/>
-              </a:lnSpc>
-            </a:pPr>
-            <a:r>
-              <a:rPr sz="2400" b="0">
-                <a:solidFill>
-                  <a:srgbClr val="263044"/>
-                </a:solidFill>
-                <a:latin typeface="Malgun Gothic"/>
-                <a:ea typeface="Malgun Gothic"/>
-              </a:rPr>
-              <a:t>- 수치 질문은 정답 구간의 검색을 확인하고 충실도는 HyDE+CAD</a:t>
-            </a:r>
-          </a:p>
-        </p:txBody>
-      </p:sp>
-      <p:sp>
-        <p:nvSpPr>
-          <p:cNvPr id="34" name="TextBox 33"/>
-          <p:cNvSpPr txBox="1"/>
-          <p:nvPr/>
-        </p:nvSpPr>
-        <p:spPr>
-          <a:xfrm>
-            <a:off x="10980000" y="25557647"/>
-            <a:ext cx="9612000" cy="402361"/>
-          </a:xfrm>
-          <a:prstGeom prst="rect">
-            <a:avLst/>
-          </a:prstGeom>
-          <a:noFill/>
-        </p:spPr>
-        <p:txBody>
-          <a:bodyPr wrap="square" lIns="0" rIns="0" tIns="0" bIns="0">
-            <a:spAutoFit/>
-          </a:bodyPr>
-          <a:lstStyle/>
-          <a:p>
-            <a:pPr algn="l">
-              <a:lnSpc>
-                <a:spcPct val="115000"/>
-              </a:lnSpc>
-            </a:pPr>
-            <a:r>
-              <a:rPr sz="2400" b="0">
-                <a:solidFill>
-                  <a:srgbClr val="263044"/>
-                </a:solidFill>
-                <a:latin typeface="Malgun Gothic"/>
-                <a:ea typeface="Malgun Gothic"/>
-              </a:rPr>
-              <a:t>- 한국어 답변은 세 기법(방법 질문 세 지표가 SCD 단독보다 높음)</a:t>
-            </a:r>
-          </a:p>
-        </p:txBody>
-      </p:sp>
-      <p:sp>
-        <p:nvSpPr>
-          <p:cNvPr id="35" name="TextBox 34"/>
-          <p:cNvSpPr txBox="1"/>
-          <p:nvPr/>
-        </p:nvSpPr>
-        <p:spPr>
-          <a:xfrm>
-            <a:off x="10980000" y="26464009"/>
-            <a:ext cx="9612000" cy="804722"/>
-          </a:xfrm>
-          <a:prstGeom prst="rect">
-            <a:avLst/>
-          </a:prstGeom>
-          <a:noFill/>
-        </p:spPr>
-        <p:txBody>
-          <a:bodyPr wrap="square" lIns="0" rIns="0" tIns="0" bIns="0">
-            <a:spAutoFit/>
-          </a:bodyPr>
-          <a:lstStyle/>
-          <a:p>
-            <a:pPr algn="l">
-              <a:lnSpc>
-                <a:spcPct val="115000"/>
-              </a:lnSpc>
-            </a:pPr>
-            <a:r>
-              <a:rPr sz="2400" b="0">
-                <a:solidFill>
-                  <a:srgbClr val="263044"/>
-                </a:solidFill>
-                <a:latin typeface="Malgun Gothic"/>
-                <a:ea typeface="Malgun Gothic"/>
-              </a:rPr>
-              <a:t>- 조합은 HyDE 단독보다 관련성이 낮고
-  일관된 이득은 SCD의 한국어 비율</a:t>
-            </a:r>
-          </a:p>
-        </p:txBody>
-      </p:sp>
-      <p:sp>
-        <p:nvSpPr>
-          <p:cNvPr id="36" name="Rectangle 35"/>
+          <p:cNvPr id="34" name="Rectangle 33"/>
           <p:cNvSpPr/>
           <p:nvPr/>
         </p:nvSpPr>
         <p:spPr>
           <a:xfrm>
-            <a:off x="792000" y="22658563"/>
-            <a:ext cx="9612000" cy="468000"/>
+            <a:off x="792000" y="28098037"/>
+            <a:ext cx="19800000" cy="468000"/>
           </a:xfrm>
           <a:prstGeom prst="rect">
             <a:avLst/>
@@ -12267,14 +12169,14 @@
       </p:sp>
       <p:sp>
         <p:nvSpPr>
-          <p:cNvPr id="37" name="TextBox 36"/>
+          <p:cNvPr id="35" name="TextBox 34"/>
           <p:cNvSpPr txBox="1"/>
           <p:nvPr/>
         </p:nvSpPr>
         <p:spPr>
           <a:xfrm>
-            <a:off x="936000" y="22683763"/>
-            <a:ext cx="9324000" cy="360000"/>
+            <a:off x="936000" y="28123237"/>
+            <a:ext cx="19512000" cy="360000"/>
           </a:xfrm>
           <a:prstGeom prst="rect">
             <a:avLst/>
@@ -12300,45 +12202,21 @@
                 <a:latin typeface="Malgun Gothic"/>
                 <a:ea typeface="Malgun Gothic"/>
               </a:rPr>
-              <a:t>05 방법 질문 25개의 원점수 평행좌표</a:t>
+              <a:t>06 결론</a:t>
             </a:r>
           </a:p>
         </p:txBody>
       </p:sp>
-      <p:pic>
-        <p:nvPicPr>
-          <p:cNvPr id="38" name="Picture 37" descr="poster_parallel.png"/>
-          <p:cNvPicPr>
-            <a:picLocks noChangeAspect="1"/>
-          </p:cNvPicPr>
-          <p:nvPr/>
-        </p:nvPicPr>
-        <p:blipFill>
-          <a:blip r:embed="rId3"/>
-          <a:stretch>
-            <a:fillRect/>
-          </a:stretch>
-        </p:blipFill>
-        <p:spPr>
-          <a:xfrm>
-            <a:off x="792000" y="23270563"/>
-            <a:ext cx="9612000" cy="5565083"/>
-          </a:xfrm>
-          <a:prstGeom prst="rect">
-            <a:avLst/>
-          </a:prstGeom>
-        </p:spPr>
-      </p:pic>
       <p:sp>
         <p:nvSpPr>
-          <p:cNvPr id="39" name="TextBox 38"/>
+          <p:cNvPr id="36" name="TextBox 35"/>
           <p:cNvSpPr txBox="1"/>
           <p:nvPr/>
         </p:nvSpPr>
         <p:spPr>
           <a:xfrm>
-            <a:off x="792000" y="28871646"/>
-            <a:ext cx="9612000" cy="637072"/>
+            <a:off x="792000" y="28710037"/>
+            <a:ext cx="9612000" cy="368831"/>
           </a:xfrm>
           <a:prstGeom prst="rect">
             <a:avLst/>
@@ -12357,15 +12235,134 @@
               </a:lnSpc>
             </a:pPr>
             <a:r>
-              <a:rPr sz="1900" b="0">
+              <a:rPr sz="2200" b="0">
                 <a:solidFill>
                   <a:srgbClr val="263044"/>
                 </a:solidFill>
                 <a:latin typeface="Malgun Gothic"/>
                 <a:ea typeface="Malgun Gothic"/>
               </a:rPr>
-              <a:t>- HyDE 적용 후 관련성 축의 선이 위로 모이고
-  관련성 0점 답변이 5개에서 1개로 줄어듦</a:t>
+              <a:t>- 관련성과 응답 시간이 중요하면 HyDE 하나(개념과 결과 질문 포함)</a:t>
+            </a:r>
+          </a:p>
+        </p:txBody>
+      </p:sp>
+      <p:sp>
+        <p:nvSpPr>
+          <p:cNvPr id="37" name="TextBox 36"/>
+          <p:cNvSpPr txBox="1"/>
+          <p:nvPr/>
+        </p:nvSpPr>
+        <p:spPr>
+          <a:xfrm>
+            <a:off x="792000" y="29150869"/>
+            <a:ext cx="9612000" cy="368831"/>
+          </a:xfrm>
+          <a:prstGeom prst="rect">
+            <a:avLst/>
+          </a:prstGeom>
+          <a:noFill/>
+        </p:spPr>
+        <p:txBody>
+          <a:bodyPr wrap="square" lIns="0" rIns="0" tIns="0" bIns="0">
+            <a:spAutoFit/>
+          </a:bodyPr>
+          <a:lstStyle/>
+          <a:p>
+            <a:pPr algn="l">
+              <a:lnSpc>
+                <a:spcPct val="115000"/>
+              </a:lnSpc>
+            </a:pPr>
+            <a:r>
+              <a:rPr sz="2200" b="0">
+                <a:solidFill>
+                  <a:srgbClr val="263044"/>
+                </a:solidFill>
+                <a:latin typeface="Malgun Gothic"/>
+                <a:ea typeface="Malgun Gothic"/>
+              </a:rPr>
+              <a:t>- 수치 질문은 정답 구간의 검색을 확인하고 충실도는 HyDE+CAD</a:t>
+            </a:r>
+          </a:p>
+        </p:txBody>
+      </p:sp>
+      <p:sp>
+        <p:nvSpPr>
+          <p:cNvPr id="38" name="TextBox 37"/>
+          <p:cNvSpPr txBox="1"/>
+          <p:nvPr/>
+        </p:nvSpPr>
+        <p:spPr>
+          <a:xfrm>
+            <a:off x="10980000" y="28710037"/>
+            <a:ext cx="9612000" cy="368831"/>
+          </a:xfrm>
+          <a:prstGeom prst="rect">
+            <a:avLst/>
+          </a:prstGeom>
+          <a:noFill/>
+        </p:spPr>
+        <p:txBody>
+          <a:bodyPr wrap="square" lIns="0" rIns="0" tIns="0" bIns="0">
+            <a:spAutoFit/>
+          </a:bodyPr>
+          <a:lstStyle/>
+          <a:p>
+            <a:pPr algn="l">
+              <a:lnSpc>
+                <a:spcPct val="115000"/>
+              </a:lnSpc>
+            </a:pPr>
+            <a:r>
+              <a:rPr sz="2200" b="0">
+                <a:solidFill>
+                  <a:srgbClr val="263044"/>
+                </a:solidFill>
+                <a:latin typeface="Malgun Gothic"/>
+                <a:ea typeface="Malgun Gothic"/>
+              </a:rPr>
+              <a:t>- 한국어 답변은 세 기법(방법 질문 세 지표가 SCD 단독보다 높음)</a:t>
+            </a:r>
+          </a:p>
+        </p:txBody>
+      </p:sp>
+      <p:sp>
+        <p:nvSpPr>
+          <p:cNvPr id="39" name="TextBox 38"/>
+          <p:cNvSpPr txBox="1"/>
+          <p:nvPr/>
+        </p:nvSpPr>
+        <p:spPr>
+          <a:xfrm>
+            <a:off x="10980000" y="29150869"/>
+            <a:ext cx="9612000" cy="368831"/>
+          </a:xfrm>
+          <a:prstGeom prst="rect">
+            <a:avLst/>
+          </a:prstGeom>
+          <a:noFill/>
+        </p:spPr>
+        <p:txBody>
+          <a:bodyPr wrap="square" lIns="0" rIns="0" tIns="0" bIns="0">
+            <a:spAutoFit/>
+          </a:bodyPr>
+          <a:lstStyle/>
+          <a:p>
+            <a:pPr algn="l">
+              <a:lnSpc>
+                <a:spcPct val="115000"/>
+              </a:lnSpc>
+            </a:pPr>
+            <a:r>
+              <a:rPr sz="2200" b="0">
+                <a:solidFill>
+                  <a:srgbClr val="263044"/>
+                </a:solidFill>
+                <a:latin typeface="Malgun Gothic"/>
+                <a:ea typeface="Malgun Gothic"/>
+              </a:rPr>
+              <a:t>- 조합은 HyDE 단독보다 관련성이 낮고 일관된 이득은 SCD의 한국어 비율</a:t>
             </a:r>
           </a:p>
         </p:txBody>
@@ -12378,7 +12375,7 @@
         </p:nvSpPr>
         <p:spPr>
           <a:xfrm>
-            <a:off x="792000" y="29706719"/>
+            <a:off x="792000" y="29663700"/>
             <a:ext cx="19800000" cy="324000"/>
           </a:xfrm>
           <a:prstGeom prst="rect">

--- a/FINALDOCS/POSTER/VARIANT_A/M_RAG_A1_FINAL_EDITABLE.pptx
+++ b/FINALDOCS/POSTER/VARIANT_A/M_RAG_A1_FINAL_EDITABLE.pptx
@@ -3696,7 +3696,7 @@
                 <a:latin typeface="Malgun Gothic"/>
                 <a:ea typeface="Malgun Gothic"/>
               </a:rPr>
-              <a:t>HyDE Hypothetical Document Embeddings   CAD Context-Aware Decoding   SCD Soft Constrained Decoding   패널마다 미적용과 단독 적용 조건을 비교, 점 위치와 글자 크기는 원리를 보인 개념도</a:t>
+              <a:t>HyDE Hypothetical Document Embeddings   CAD Context-Aware Decoding   SCD Soft Constrained Decoding   패널마다 미적용과 단독 적용 조건을 비교</a:t>
             </a:r>
           </a:p>
         </p:txBody>

--- a/FINALDOCS/POSTER/VARIANT_A/M_RAG_A1_FINAL_EDITABLE.pptx
+++ b/FINALDOCS/POSTER/VARIANT_A/M_RAG_A1_FINAL_EDITABLE.pptx
@@ -12242,7 +12242,7 @@
                 <a:latin typeface="Malgun Gothic"/>
                 <a:ea typeface="Malgun Gothic"/>
               </a:rPr>
-              <a:t>- 관련성과 응답 시간이 중요하면 HyDE 하나(개념과 결과 질문 포함)</a:t>
+              <a:t>- 관련성과 처리 시간이 중요하면 HyDE 하나(개념과 결과 질문 포함)</a:t>
             </a:r>
           </a:p>
         </p:txBody>
